--- a/GOplan_Instruction.pptx
+++ b/GOplan_Instruction.pptx
@@ -220,7 +220,7 @@
           <a:p>
             <a:fld id="{09CE0857-8F89-4457-A714-A77A66401948}" type="datetimeFigureOut">
               <a:rPr lang="zh-CN" altLang="en-US" smtClean="0"/>
-              <a:t>2024/9/6</a:t>
+              <a:t>2024/9/8</a:t>
             </a:fld>
             <a:endParaRPr lang="zh-CN" altLang="en-US"/>
           </a:p>
@@ -1049,7 +1049,7 @@
           <a:p>
             <a:fld id="{BFFB112F-785E-4223-8F54-9DB1EEF8F204}" type="datetimeFigureOut">
               <a:rPr lang="zh-CN" altLang="en-US" smtClean="0"/>
-              <a:t>2024/9/6</a:t>
+              <a:t>2024/9/8</a:t>
             </a:fld>
             <a:endParaRPr lang="zh-CN" altLang="en-US"/>
           </a:p>
@@ -1257,7 +1257,7 @@
           <a:p>
             <a:fld id="{BFFB112F-785E-4223-8F54-9DB1EEF8F204}" type="datetimeFigureOut">
               <a:rPr lang="zh-CN" altLang="en-US" smtClean="0"/>
-              <a:t>2024/9/6</a:t>
+              <a:t>2024/9/8</a:t>
             </a:fld>
             <a:endParaRPr lang="zh-CN" altLang="en-US"/>
           </a:p>
@@ -1513,7 +1513,7 @@
           <a:p>
             <a:fld id="{BFFB112F-785E-4223-8F54-9DB1EEF8F204}" type="datetimeFigureOut">
               <a:rPr lang="zh-CN" altLang="en-US" smtClean="0"/>
-              <a:t>2024/9/6</a:t>
+              <a:t>2024/9/8</a:t>
             </a:fld>
             <a:endParaRPr lang="zh-CN" altLang="en-US"/>
           </a:p>
@@ -1683,7 +1683,7 @@
           <a:p>
             <a:fld id="{BFFB112F-785E-4223-8F54-9DB1EEF8F204}" type="datetimeFigureOut">
               <a:rPr lang="zh-CN" altLang="en-US" smtClean="0"/>
-              <a:t>2024/9/6</a:t>
+              <a:t>2024/9/8</a:t>
             </a:fld>
             <a:endParaRPr lang="zh-CN" altLang="en-US"/>
           </a:p>
@@ -2026,7 +2026,7 @@
           <a:p>
             <a:fld id="{BFFB112F-785E-4223-8F54-9DB1EEF8F204}" type="datetimeFigureOut">
               <a:rPr lang="zh-CN" altLang="en-US" smtClean="0"/>
-              <a:t>2024/9/6</a:t>
+              <a:t>2024/9/8</a:t>
             </a:fld>
             <a:endParaRPr lang="zh-CN" altLang="en-US"/>
           </a:p>
@@ -2301,7 +2301,7 @@
           <a:p>
             <a:fld id="{BFFB112F-785E-4223-8F54-9DB1EEF8F204}" type="datetimeFigureOut">
               <a:rPr lang="zh-CN" altLang="en-US" smtClean="0"/>
-              <a:t>2024/9/6</a:t>
+              <a:t>2024/9/8</a:t>
             </a:fld>
             <a:endParaRPr lang="zh-CN" altLang="en-US"/>
           </a:p>
@@ -2680,7 +2680,7 @@
           <a:p>
             <a:fld id="{BFFB112F-785E-4223-8F54-9DB1EEF8F204}" type="datetimeFigureOut">
               <a:rPr lang="zh-CN" altLang="en-US" smtClean="0"/>
-              <a:t>2024/9/6</a:t>
+              <a:t>2024/9/8</a:t>
             </a:fld>
             <a:endParaRPr lang="zh-CN" altLang="en-US"/>
           </a:p>
@@ -2798,7 +2798,7 @@
           <a:p>
             <a:fld id="{BFFB112F-785E-4223-8F54-9DB1EEF8F204}" type="datetimeFigureOut">
               <a:rPr lang="zh-CN" altLang="en-US" smtClean="0"/>
-              <a:t>2024/9/6</a:t>
+              <a:t>2024/9/8</a:t>
             </a:fld>
             <a:endParaRPr lang="zh-CN" altLang="en-US"/>
           </a:p>
@@ -2969,7 +2969,7 @@
           <a:p>
             <a:fld id="{BFFB112F-785E-4223-8F54-9DB1EEF8F204}" type="datetimeFigureOut">
               <a:rPr lang="zh-CN" altLang="en-US" smtClean="0"/>
-              <a:t>2024/9/6</a:t>
+              <a:t>2024/9/8</a:t>
             </a:fld>
             <a:endParaRPr lang="zh-CN" altLang="en-US"/>
           </a:p>
@@ -3323,7 +3323,7 @@
           <a:p>
             <a:fld id="{BFFB112F-785E-4223-8F54-9DB1EEF8F204}" type="datetimeFigureOut">
               <a:rPr lang="zh-CN" altLang="en-US" smtClean="0"/>
-              <a:t>2024/9/6</a:t>
+              <a:t>2024/9/8</a:t>
             </a:fld>
             <a:endParaRPr lang="zh-CN" altLang="en-US"/>
           </a:p>
@@ -3700,7 +3700,7 @@
           <a:p>
             <a:fld id="{BFFB112F-785E-4223-8F54-9DB1EEF8F204}" type="datetimeFigureOut">
               <a:rPr lang="zh-CN" altLang="en-US" smtClean="0"/>
-              <a:t>2024/9/6</a:t>
+              <a:t>2024/9/8</a:t>
             </a:fld>
             <a:endParaRPr lang="zh-CN" altLang="en-US"/>
           </a:p>
@@ -3987,7 +3987,7 @@
           <a:p>
             <a:fld id="{BFFB112F-785E-4223-8F54-9DB1EEF8F204}" type="datetimeFigureOut">
               <a:rPr lang="zh-CN" altLang="en-US" smtClean="0"/>
-              <a:t>2024/9/6</a:t>
+              <a:t>2024/9/8</a:t>
             </a:fld>
             <a:endParaRPr lang="zh-CN" altLang="en-US"/>
           </a:p>
@@ -13679,7 +13679,7 @@
                 </a:solidFill>
                 <a:latin typeface="-apple-system"/>
               </a:rPr>
-              <a:t>, can also be X.</a:t>
+              <a:t>, can also be X. (ex: 12.* or 12)</a:t>
             </a:r>
             <a:endParaRPr lang="en-US" altLang="zh-CN" sz="2400" b="0" i="1" dirty="0">
               <a:solidFill>
